--- a/docs/report/ForestLens-deck.pptx
+++ b/docs/report/ForestLens-deck.pptx
@@ -5717,7 +5717,7 @@
                 </a:solidFill>
                 <a:latin typeface="Calibri"/>
               </a:rPr>
-              <a:t>79 tests, no model weights needed. </a:t>
+              <a:t>80 tests, no model weights needed. </a:t>
             </a:r>
             <a:r>
               <a:rPr sz="1400">

--- a/docs/report/ForestLens-deck.pptx
+++ b/docs/report/ForestLens-deck.pptx
@@ -1231,19 +1231,19 @@
           <a:lstStyle/>
           <a:p>
             <a:r>
-              <a:t>This is the strongest slide in the deck and the one to lead with if time is short.</a:t>
+              <a:t>Lead with the correction, not the finding. It is the most credible thing in the deck: I published a causal claim, later found a scale-accounting defect in my own pipeline, re-ran the experiment, and the claim did not survive.</a:t>
             </a:r>
           </a:p>
           <a:p/>
           <a:p>
             <a:r>
-              <a:t>I sourced the Swiss scene specifically to test this, and deliberately avoided NEON so that resolution and familiarity were separable. The result was the opposite of what I expected going in.</a:t>
+              <a:t>The mechanism: DeepForest rescales every tile to 800 px internally, so the operating scale is patch_size x gsd / 800 — which my code accounted for nowhere. Slide 10 has the detail.</a:t>
             </a:r>
           </a:p>
           <a:p/>
           <a:p>
             <a:r>
-              <a:t>If asked what would fix it: fine-tuning on closed-canopy imagery. No threshold setting reaches an 80% miss rate — I tried.</a:t>
+              <a:t>If asked which scale is correct: I do not know, and saying so is the answer. 0.05 m reaches the visual density but reports 3.4 m crowns, which is too small for mature mixed forest. Reference counts at each scale would settle it; they do not exist.</a:t>
             </a:r>
           </a:p>
         </p:txBody>
@@ -5717,7 +5717,7 @@
                 </a:solidFill>
                 <a:latin typeface="Calibri"/>
               </a:rPr>
-              <a:t>80 tests, no model weights needed. </a:t>
+              <a:t>108 tests, no model weights needed. </a:t>
             </a:r>
             <a:r>
               <a:rPr sz="1400">
@@ -11522,7 +11522,7 @@
                 </a:solidFill>
                 <a:latin typeface="Calibri"/>
               </a:rPr>
-              <a:t>Canopy closure, not resolution, is the binding constraint</a:t>
+              <a:t>Recall under closure is strongly scale-dependent</a:t>
             </a:r>
           </a:p>
         </p:txBody>
@@ -12217,8 +12217,8 @@
         </p:nvSpPr>
         <p:spPr>
           <a:xfrm>
-            <a:off x="4480560" y="3200400"/>
-            <a:ext cx="7040880" cy="2834640"/>
+            <a:off x="4480560" y="3108960"/>
+            <a:ext cx="7040880" cy="2926080"/>
           </a:xfrm>
           <a:prstGeom prst="rect">
             <a:avLst/>
@@ -12240,22 +12240,22 @@
               </a:spcAft>
             </a:pPr>
             <a:r>
-              <a:rPr b="1" sz="1400">
+              <a:rPr b="1" sz="1300">
                 <a:solidFill>
                   <a:srgbClr val="111418"/>
                 </a:solidFill>
                 <a:latin typeface="Calibri"/>
               </a:rPr>
-              <a:t>The finest scene performed worst. </a:t>
-            </a:r>
-            <a:r>
-              <a:rPr sz="1400">
+              <a:t>At the shipped scale it recovers ~1 crown in 5. </a:t>
+            </a:r>
+            <a:r>
+              <a:rPr sz="1300">
                 <a:solidFill>
                   <a:srgbClr val="3B4250"/>
                 </a:solidFill>
                 <a:latin typeface="Calibri"/>
               </a:rPr>
-              <a:t>At exactly the training resolution it recovers roughly one crown in five.</a:t>
+              <a:t>38 trees/ha against a blind visual density of 183 ± 53 /ha.</a:t>
             </a:r>
           </a:p>
           <a:p>
@@ -12268,22 +12268,22 @@
               </a:spcAft>
             </a:pPr>
             <a:r>
-              <a:rPr b="1" sz="1400">
+              <a:rPr b="1" sz="1300">
                 <a:solidFill>
                   <a:srgbClr val="111418"/>
                 </a:solidFill>
                 <a:latin typeface="Calibri"/>
               </a:rPr>
-              <a:t>Counts saturate. </a:t>
-            </a:r>
-            <a:r>
-              <a:rPr sz="1400">
+              <a:t>But vary only the network scale: </a:t>
+            </a:r>
+            <a:r>
+              <a:rPr sz="1300">
                 <a:solidFill>
                   <a:srgbClr val="3B4250"/>
                 </a:solidFill>
                 <a:latin typeface="Calibri"/>
               </a:rPr>
-              <a:t>71.2 vs 72.2 trees/ha across two visibly different stand densities — the detector stops separating crowns once they interlock.</a:t>
+              <a:t>29 / 158 / 408 / 548 trees at 0.14 / 0.10 / 0.07 / 0.05 m per network pixel. At 0.05 m it reaches 131/ha — inside the visual interval.</a:t>
             </a:r>
           </a:p>
           <a:p>
@@ -12296,22 +12296,50 @@
               </a:spcAft>
             </a:pPr>
             <a:r>
-              <a:rPr b="1" sz="1400">
+              <a:rPr b="1" sz="1300">
                 <a:solidFill>
                   <a:srgbClr val="111418"/>
                 </a:solidFill>
                 <a:latin typeface="Calibri"/>
               </a:rPr>
-              <a:t>Two causes, confounded. </a:t>
-            </a:r>
-            <a:r>
-              <a:rPr sz="1400">
+              <a:t>So I had this wrong. </a:t>
+            </a:r>
+            <a:r>
+              <a:rPr sz="1300">
                 <a:solidFill>
                   <a:srgbClr val="3B4250"/>
                 </a:solidFill>
                 <a:latin typeface="Calibri"/>
               </a:rPr>
-              <a:t>Closure removes the separable apexes the detector needs; and DeepForest's training data is largely open North American conifer, not closed European mixed forest.</a:t>
+              <a:t>I first reported closure rather than resolution as the binding constraint. A substantial part of the deficit was my own scale choice. Which scale is right is unresolved — the finer ones shrink median crowns to 3.4 m, so they may be fragmenting.</a:t>
+            </a:r>
+          </a:p>
+          <a:p>
+            <a:pPr>
+              <a:lnSpc>
+                <a:spcPct val="114000"/>
+              </a:lnSpc>
+              <a:spcAft>
+                <a:spcPts val="1100"/>
+              </a:spcAft>
+            </a:pPr>
+            <a:r>
+              <a:rPr b="1" sz="1300">
+                <a:solidFill>
+                  <a:srgbClr val="111418"/>
+                </a:solidFill>
+                <a:latin typeface="Calibri"/>
+              </a:rPr>
+              <a:t>Counts still saturate. </a:t>
+            </a:r>
+            <a:r>
+              <a:rPr sz="1300">
+                <a:solidFill>
+                  <a:srgbClr val="3B4250"/>
+                </a:solidFill>
+                <a:latin typeface="Calibri"/>
+              </a:rPr>
+              <a:t>71.2 vs 72.2 trees/ha across visibly different densities — that part is unaffected.</a:t>
             </a:r>
           </a:p>
         </p:txBody>
@@ -12324,14 +12352,14 @@
         </p:nvSpPr>
         <p:spPr>
           <a:xfrm>
-            <a:off x="4480560" y="5394960"/>
-            <a:ext cx="7040880" cy="777240"/>
+            <a:off x="4480560" y="5623560"/>
+            <a:ext cx="7040880" cy="685800"/>
           </a:xfrm>
           <a:prstGeom prst="rect">
             <a:avLst/>
           </a:prstGeom>
           <a:solidFill>
-            <a:srgbClr val="EEF4F0"/>
+            <a:srgbClr val="FDF6E7"/>
           </a:solidFill>
           <a:ln>
             <a:noFill/>
@@ -12368,14 +12396,14 @@
         </p:nvSpPr>
         <p:spPr>
           <a:xfrm>
-            <a:off x="4480560" y="5394960"/>
-            <a:ext cx="41148" cy="777240"/>
+            <a:off x="4480560" y="5623560"/>
+            <a:ext cx="41148" cy="685800"/>
           </a:xfrm>
           <a:prstGeom prst="rect">
             <a:avLst/>
           </a:prstGeom>
           <a:solidFill>
-            <a:srgbClr val="1F6B47"/>
+            <a:srgbClr val="9A6206"/>
           </a:solidFill>
           <a:ln>
             <a:noFill/>
@@ -12412,8 +12440,8 @@
         </p:nvSpPr>
         <p:spPr>
           <a:xfrm>
-            <a:off x="4718304" y="5541264"/>
-            <a:ext cx="6583680" cy="502920"/>
+            <a:off x="4718304" y="5769864"/>
+            <a:ext cx="6583680" cy="411480"/>
           </a:xfrm>
           <a:prstGeom prst="rect">
             <a:avLst/>
@@ -12441,7 +12469,7 @@
                 </a:solidFill>
                 <a:latin typeface="Calibri"/>
               </a:rPr>
-              <a:t>This inverts the usual procurement instinct. Buying finer imagery does not fix individual-tree analysis under closed canopy — assess stand structure before commissioning imagery.</a:t>
+              <a:t>Corrected after investigation, not before. Settling it needs reference counts at each scale, which do not exist — so the honest position is that recall is scale-sensitive and the cause is not established.</a:t>
             </a:r>
           </a:p>
         </p:txBody>

--- a/docs/report/ForestLens-deck.pptx
+++ b/docs/report/ForestLens-deck.pptx
@@ -5717,7 +5717,7 @@
                 </a:solidFill>
                 <a:latin typeface="Calibri"/>
               </a:rPr>
-              <a:t>108 tests, no model weights needed. </a:t>
+              <a:t>120 tests, no model weights needed. </a:t>
             </a:r>
             <a:r>
               <a:rPr sz="1400">
@@ -11937,7 +11937,7 @@
                           </a:solidFill>
                           <a:latin typeface="Calibri"/>
                         </a:rPr>
-                        <a:t>17.0%</a:t>
+                        <a:t>15.1%</a:t>
                       </a:r>
                     </a:p>
                   </a:txBody>
@@ -12054,7 +12054,7 @@
                           </a:solidFill>
                           <a:latin typeface="Calibri"/>
                         </a:rPr>
-                        <a:t>15.1%</a:t>
+                        <a:t>13.3%</a:t>
                       </a:r>
                     </a:p>
                   </a:txBody>
@@ -12906,7 +12906,7 @@
                           </a:solidFill>
                           <a:latin typeface="Calibri"/>
                         </a:rPr>
-                        <a:t>17.0%</a:t>
+                        <a:t>15.1%</a:t>
                       </a:r>
                     </a:p>
                   </a:txBody>
@@ -12952,7 +12952,7 @@
                           </a:solidFill>
                           <a:latin typeface="Calibri"/>
                         </a:rPr>
-                        <a:t>76 pts</a:t>
+                        <a:t>78 pts</a:t>
                       </a:r>
                     </a:p>
                   </a:txBody>
@@ -13000,7 +13000,7 @@
                           </a:solidFill>
                           <a:latin typeface="Calibri"/>
                         </a:rPr>
-                        <a:t>15.1%</a:t>
+                        <a:t>13.3%</a:t>
                       </a:r>
                     </a:p>
                   </a:txBody>
@@ -13046,7 +13046,7 @@
                           </a:solidFill>
                           <a:latin typeface="Calibri"/>
                         </a:rPr>
-                        <a:t>81 pts</a:t>
+                        <a:t>83 pts</a:t>
                       </a:r>
                     </a:p>
                   </a:txBody>

--- a/docs/report/ForestLens-deck.pptx
+++ b/docs/report/ForestLens-deck.pptx
@@ -5717,7 +5717,7 @@
                 </a:solidFill>
                 <a:latin typeface="Calibri"/>
               </a:rPr>
-              <a:t>120 tests, no model weights needed. </a:t>
+              <a:t>124 tests, no model weights needed. </a:t>
             </a:r>
             <a:r>
               <a:rPr sz="1400">

--- a/docs/report/ForestLens-deck.pptx
+++ b/docs/report/ForestLens-deck.pptx
@@ -5429,8 +5429,8 @@
         </p:nvSpPr>
         <p:spPr>
           <a:xfrm>
-            <a:off x="6583680" y="5257800"/>
-            <a:ext cx="4937760" cy="1005840"/>
+            <a:off x="6583680" y="5212080"/>
+            <a:ext cx="4937760" cy="1371600"/>
           </a:xfrm>
           <a:prstGeom prst="rect">
             <a:avLst/>
@@ -5458,13 +5458,13 @@
                 </a:solidFill>
                 <a:latin typeface="Calibri"/>
               </a:rPr>
-              <a:t>NEGATIVE CONTROLS</a:t>
+              <a:t>MEASURED, THEN ADOPTED CONDITIONALLY</a:t>
             </a:r>
           </a:p>
           <a:p>
             <a:pPr algn="l">
               <a:lnSpc>
-                <a:spcPct val="110000"/>
+                <a:spcPct val="108000"/>
               </a:lnSpc>
               <a:spcAft>
                 <a:spcPts val="0"/>
@@ -5477,7 +5477,7 @@
                 </a:solidFill>
                 <a:latin typeface="Calibri"/>
               </a:rPr>
-              <a:t>Open water: 2 detections over 9.77 ha, 0.0% crown union — effectively clean. Urban core: detections land on real street trees, roofs almost entirely clear, a handful of genuine rooftop false positives.</a:t>
+              <a:t>A SegFormer upper bound fixes what the index gets wrong — open water 94.3% → 29.3%, urban 31.0% → 1.7% — so it ships as an option. Not as the default: it swings 86.2% → 1.6% on one scene depending only on tiling. Better is not the same as trustworthy.</a:t>
             </a:r>
           </a:p>
         </p:txBody>
@@ -6626,7 +6626,7 @@
                 </a:solidFill>
                 <a:latin typeface="Calibri"/>
               </a:rPr>
-              <a:t>The upper cover bound is approximate. </a:t>
+              <a:t>Neither cover bound is a measurement. </a:t>
             </a:r>
             <a:r>
               <a:rPr sz="1350">
@@ -6635,7 +6635,7 @@
                 </a:solidFill>
                 <a:latin typeface="Calibri"/>
               </a:rPr>
-              <a:t>It over-counts green water and under-counts shadowed canopy.</a:t>
+              <a:t>The index over-counts green water; the semantic model swings 54× with tiling.</a:t>
             </a:r>
           </a:p>
           <a:p>
@@ -10164,7 +10164,7 @@
                 </a:solidFill>
                 <a:latin typeface="Calibri"/>
               </a:rPr>
-              <a:t>the UNION of crown footprints ÷ analysed ground area — a union, so overlapping detections are not double counted.</a:t>
+              <a:t>exact geometric UNION of crown footprints (shapely) ÷ analysed ground area — dissolved, so overlaps are not double counted.</a:t>
             </a:r>
           </a:p>
           <a:p>
@@ -13164,7 +13164,7 @@
         <p:spPr>
           <a:xfrm>
             <a:off x="6537960" y="1783080"/>
-            <a:ext cx="4983480" cy="2377440"/>
+            <a:ext cx="4983480" cy="2651760"/>
           </a:xfrm>
           <a:prstGeom prst="rect">
             <a:avLst/>
@@ -13205,32 +13205,32 @@
               </a:spcAft>
             </a:pPr>
             <a:r>
-              <a:rPr sz="1400" b="1" i="0">
+              <a:rPr sz="1350" b="1" i="0">
                 <a:solidFill>
                   <a:srgbClr val="111418"/>
                 </a:solidFill>
                 <a:latin typeface="Calibri"/>
               </a:rPr>
-              <a:t>Lower bound — union of detected crowns.</a:t>
+              <a:t>Lower — exact geometric union of crowns.</a:t>
             </a:r>
           </a:p>
           <a:p>
             <a:pPr algn="l">
               <a:lnSpc>
-                <a:spcPct val="110000"/>
+                <a:spcPct val="108000"/>
               </a:lnSpc>
               <a:spcAft>
-                <a:spcPts val="1000"/>
+                <a:spcPts val="900"/>
               </a:spcAft>
             </a:pPr>
             <a:r>
-              <a:rPr sz="1300" b="0" i="0">
+              <a:rPr sz="1250" b="0" i="0">
                 <a:solidFill>
                   <a:srgbClr val="3B4250"/>
                 </a:solidFill>
                 <a:latin typeface="Calibri"/>
               </a:rPr>
-              <a:t>Too low: every crown the detector missed contributes nothing. Under closed canopy, far too low.</a:t>
+              <a:t>shapely.ops.unary_union, dissolved exactly. Too low: every missed crown contributes nothing. Replacing a rasterised union cut this ~2 points, because rasterising fractional boxes counts every pixel touched.</a:t>
             </a:r>
           </a:p>
           <a:p>
@@ -13243,32 +13243,32 @@
               </a:spcAft>
             </a:pPr>
             <a:r>
-              <a:rPr sz="1400" b="1" i="0">
+              <a:rPr sz="1350" b="1" i="0">
                 <a:solidFill>
                   <a:srgbClr val="111418"/>
                 </a:solidFill>
                 <a:latin typeface="Calibri"/>
               </a:rPr>
-              <a:t>Upper bound — pixels where 2G − R − B &gt; 0.</a:t>
+              <a:t>Upper — vegetation index, or a semantic model.</a:t>
             </a:r>
           </a:p>
           <a:p>
             <a:pPr algn="l">
               <a:lnSpc>
-                <a:spcPct val="110000"/>
+                <a:spcPct val="108000"/>
               </a:lnSpc>
               <a:spcAft>
                 <a:spcPts val="0"/>
               </a:spcAft>
             </a:pPr>
             <a:r>
-              <a:rPr sz="1300" b="0" i="0">
+              <a:rPr sz="1250" b="0" i="0">
                 <a:solidFill>
                   <a:srgbClr val="3B4250"/>
                 </a:solidFill>
                 <a:latin typeface="Calibri"/>
               </a:rPr>
-              <a:t>Too high: grass, shrubs and crops are green too. Deeply shadowed canopy can drop below the threshold and be missed.</a:t>
+              <a:t>Excess Green is scale-free but calls open water 94.3% vegetation. An optional SegFormer gives 29.3% there and 1.7% on urban — but is scale-sensitive (86.2% whole-image vs 1.6% tiled) and saturates at 100% on dense conifer. Offered, not defaulted; the estimator is recorded per run.</a:t>
             </a:r>
           </a:p>
         </p:txBody>
